--- a/assets/pptx/catalog-252.pptx
+++ b/assets/pptx/catalog-252.pptx
@@ -3252,7 +3252,7 @@
                 <a:ea typeface="Ebrima"/>
                 <a:cs typeface="Ebrima"/>
               </a:rPr>
-              <a:t>ሃሌሉያ ሃሌሉያ አሜን (4x)</a:t>
+              <a:t>ሃሌሉያ ሃሌሉያ አሜን 4x</a:t>
             </a:r>
           </a:p>
         </p:txBody>
@@ -3337,7 +3337,7 @@
                 <a:ea typeface="Ebrima"/>
                 <a:cs typeface="Ebrima"/>
               </a:rPr>
-              <a:t>ዘወትር እሩህሩህ ነህ ተመስገን እግዚአብሔር (2x)</a:t>
+              <a:t>ዘወትር እሩህሩህ ነህ ተመስገን እግዚአብሔር 2x</a:t>
             </a:r>
           </a:p>
         </p:txBody>
@@ -3422,7 +3422,7 @@
                 <a:ea typeface="Ebrima"/>
                 <a:cs typeface="Ebrima"/>
               </a:rPr>
-              <a:t>ልቤም ይሄ ገብቶት ያከብራል ስምህን (2x)</a:t>
+              <a:t>ልቤም ይሄ ገብቶት ያከብራል ስምህን 2x</a:t>
             </a:r>
           </a:p>
         </p:txBody>
@@ -3489,7 +3489,7 @@
                 <a:ea typeface="Ebrima"/>
                 <a:cs typeface="Ebrima"/>
               </a:rPr>
-              <a:t>ሃሌሉያ ሃሌሉያ አሜን (4x)</a:t>
+              <a:t>ሃሌሉያ ሃሌሉያ አሜን 4x</a:t>
             </a:r>
           </a:p>
           <a:p>
@@ -3507,7 +3507,7 @@
                 <a:ea typeface="Ebrima"/>
                 <a:cs typeface="Ebrima"/>
               </a:rPr>
-              <a:t>ሃሌሉያ ሃሌሉያ አሜን (4x)</a:t>
+              <a:t>ሃሌሉያ ሃሌሉያ አሜን 4x</a:t>
             </a:r>
           </a:p>
           <a:p>
@@ -3525,7 +3525,7 @@
                 <a:ea typeface="Ebrima"/>
                 <a:cs typeface="Ebrima"/>
               </a:rPr>
-              <a:t>ኦ ሃሌሉያ (3x) ሃሌሉያ ኦ ሃሌሉያ</a:t>
+              <a:t>ኦ ሃሌሉያ 3x ሃሌሉያ ኦ ሃሌሉያ</a:t>
             </a:r>
           </a:p>
           <a:p>
@@ -3543,7 +3543,7 @@
                 <a:ea typeface="Ebrima"/>
                 <a:cs typeface="Ebrima"/>
               </a:rPr>
-              <a:t>ኦ ሃሌሉያ (3x) ሃሌሉያ ኦ ሃሌሉያ</a:t>
+              <a:t>ኦ ሃሌሉያ 3x ሃሌሉያ ኦ ሃሌሉያ</a:t>
             </a:r>
           </a:p>
         </p:txBody>
@@ -3628,7 +3628,7 @@
                 <a:ea typeface="Ebrima"/>
                 <a:cs typeface="Ebrima"/>
               </a:rPr>
-              <a:t>ዘወትር እሩህሩህ ነህ ተመስገን እግዚአብሔር (2x)</a:t>
+              <a:t>ዘወትር እሩህሩህ ነህ ተመስገን እግዚአብሔር 2x</a:t>
             </a:r>
           </a:p>
         </p:txBody>
@@ -3713,7 +3713,7 @@
                 <a:ea typeface="Ebrima"/>
                 <a:cs typeface="Ebrima"/>
               </a:rPr>
-              <a:t>ልቤም ይሄ ገብቶት ያከብራል ስምህን (2x)</a:t>
+              <a:t>ልቤም ይሄ ገብቶት ያከብራል ስምህን 2x</a:t>
             </a:r>
           </a:p>
         </p:txBody>
@@ -3780,7 +3780,7 @@
                 <a:ea typeface="Ebrima"/>
                 <a:cs typeface="Ebrima"/>
               </a:rPr>
-              <a:t>ሃሌሉያ ሃሌሉያ አሜን (4x)</a:t>
+              <a:t>ሃሌሉያ ሃሌሉያ አሜን 4x</a:t>
             </a:r>
           </a:p>
           <a:p>
@@ -3798,7 +3798,7 @@
                 <a:ea typeface="Ebrima"/>
                 <a:cs typeface="Ebrima"/>
               </a:rPr>
-              <a:t>ሃሌሉያ ሃሌሉያ አሜን (4x)</a:t>
+              <a:t>ሃሌሉያ ሃሌሉያ አሜን 4x</a:t>
             </a:r>
           </a:p>
           <a:p>
@@ -3816,7 +3816,7 @@
                 <a:ea typeface="Ebrima"/>
                 <a:cs typeface="Ebrima"/>
               </a:rPr>
-              <a:t>ኦ ሃሌሉያ (3x) ሃሌሉያ ኦ ሃሌሉያ</a:t>
+              <a:t>ኦ ሃሌሉያ 3x ሃሌሉያ ኦ ሃሌሉያ</a:t>
             </a:r>
           </a:p>
           <a:p>
@@ -3834,7 +3834,7 @@
                 <a:ea typeface="Ebrima"/>
                 <a:cs typeface="Ebrima"/>
               </a:rPr>
-              <a:t>ኦ ሃሌሉያ (3x) ሃሌሉያ ኦ ሃሌሉያ</a:t>
+              <a:t>ኦ ሃሌሉያ 3x ሃሌሉያ ኦ ሃሌሉያ</a:t>
             </a:r>
           </a:p>
         </p:txBody>
@@ -3991,7 +3991,7 @@
                 <a:ea typeface="Ebrima"/>
                 <a:cs typeface="Ebrima"/>
               </a:rPr>
-              <a:t>ነገር ግን ደምህን ተማምኜ ምህረትህ ነው ቤቴ (2x)</a:t>
+              <a:t>ነገር ግን ደምህን ተማምኜ ምህረትህ ነው ቤቴ 2x</a:t>
             </a:r>
           </a:p>
         </p:txBody>
@@ -4058,7 +4058,7 @@
                 <a:ea typeface="Ebrima"/>
                 <a:cs typeface="Ebrima"/>
               </a:rPr>
-              <a:t>ሃሌሉያ ሃሌሉያ አሜን (4x)</a:t>
+              <a:t>ሃሌሉያ ሃሌሉያ አሜን 4x</a:t>
             </a:r>
           </a:p>
           <a:p>
@@ -4130,7 +4130,7 @@
                 <a:ea typeface="Ebrima"/>
                 <a:cs typeface="Ebrima"/>
               </a:rPr>
-              <a:t>ልቤም ይሄ ገብቶት ያከብራል ስምህን (2x)</a:t>
+              <a:t>ልቤም ይሄ ገብቶት ያከብራል ስምህን 2x</a:t>
             </a:r>
           </a:p>
         </p:txBody>
@@ -4197,7 +4197,7 @@
                 <a:ea typeface="Ebrima"/>
                 <a:cs typeface="Ebrima"/>
               </a:rPr>
-              <a:t>ሃሌሉያ ሃሌሉያ አሜን (4x)</a:t>
+              <a:t>ሃሌሉያ ሃሌሉያ አሜን 4x</a:t>
             </a:r>
           </a:p>
           <a:p>
@@ -4215,7 +4215,7 @@
                 <a:ea typeface="Ebrima"/>
                 <a:cs typeface="Ebrima"/>
               </a:rPr>
-              <a:t>ኦ ሃሌሉያ (3x) ሃሌሉያ ኦ ሃሌሉያ</a:t>
+              <a:t>ኦ ሃሌሉያ 3x ሃሌሉያ ኦ ሃሌሉያ</a:t>
             </a:r>
           </a:p>
         </p:txBody>
@@ -4457,7 +4457,7 @@
                 <a:ea typeface="Ebrima"/>
                 <a:cs typeface="Ebrima"/>
               </a:rPr>
-              <a:t>አገለግላለሁ (2x)</a:t>
+              <a:t>አገለግላለሁ 2x</a:t>
             </a:r>
           </a:p>
         </p:txBody>
